--- a/大一下-第2学期/习概/从中美网络战看网络安全_网络安全是国家命脉所系.pptx
+++ b/大一下-第2学期/习概/从中美网络战看网络安全_网络安全是国家命脉所系.pptx
@@ -333,7 +333,7 @@
             <a:fld id="{1D8BD707-D9CF-40AE-B4C6-C98DA3205C09}" type="datetimeFigureOut">
               <a:rPr lang="en-US" smtClean="0"/>
               <a:pPr/>
-              <a:t>5/27/2024</a:t>
+              <a:t>1/7/2026</a:t>
             </a:fld>
             <a:endParaRPr lang="en-US"/>
           </a:p>
@@ -498,7 +498,7 @@
             <a:fld id="{1D8BD707-D9CF-40AE-B4C6-C98DA3205C09}" type="datetimeFigureOut">
               <a:rPr lang="en-US" smtClean="0"/>
               <a:pPr/>
-              <a:t>5/27/2024</a:t>
+              <a:t>1/7/2026</a:t>
             </a:fld>
             <a:endParaRPr lang="en-US"/>
           </a:p>
@@ -673,7 +673,7 @@
             <a:fld id="{1D8BD707-D9CF-40AE-B4C6-C98DA3205C09}" type="datetimeFigureOut">
               <a:rPr lang="en-US" smtClean="0"/>
               <a:pPr/>
-              <a:t>5/27/2024</a:t>
+              <a:t>1/7/2026</a:t>
             </a:fld>
             <a:endParaRPr lang="en-US"/>
           </a:p>
@@ -838,7 +838,7 @@
             <a:fld id="{1D8BD707-D9CF-40AE-B4C6-C98DA3205C09}" type="datetimeFigureOut">
               <a:rPr lang="en-US" smtClean="0"/>
               <a:pPr/>
-              <a:t>5/27/2024</a:t>
+              <a:t>1/7/2026</a:t>
             </a:fld>
             <a:endParaRPr lang="en-US"/>
           </a:p>
@@ -1080,7 +1080,7 @@
             <a:fld id="{1D8BD707-D9CF-40AE-B4C6-C98DA3205C09}" type="datetimeFigureOut">
               <a:rPr lang="en-US" smtClean="0"/>
               <a:pPr/>
-              <a:t>5/27/2024</a:t>
+              <a:t>1/7/2026</a:t>
             </a:fld>
             <a:endParaRPr lang="en-US"/>
           </a:p>
@@ -1362,7 +1362,7 @@
             <a:fld id="{1D8BD707-D9CF-40AE-B4C6-C98DA3205C09}" type="datetimeFigureOut">
               <a:rPr lang="en-US" smtClean="0"/>
               <a:pPr/>
-              <a:t>5/27/2024</a:t>
+              <a:t>1/7/2026</a:t>
             </a:fld>
             <a:endParaRPr lang="en-US"/>
           </a:p>
@@ -1778,7 +1778,7 @@
             <a:fld id="{1D8BD707-D9CF-40AE-B4C6-C98DA3205C09}" type="datetimeFigureOut">
               <a:rPr lang="en-US" smtClean="0"/>
               <a:pPr/>
-              <a:t>5/27/2024</a:t>
+              <a:t>1/7/2026</a:t>
             </a:fld>
             <a:endParaRPr lang="en-US"/>
           </a:p>
@@ -1892,7 +1892,7 @@
             <a:fld id="{1D8BD707-D9CF-40AE-B4C6-C98DA3205C09}" type="datetimeFigureOut">
               <a:rPr lang="en-US" smtClean="0"/>
               <a:pPr/>
-              <a:t>5/27/2024</a:t>
+              <a:t>1/7/2026</a:t>
             </a:fld>
             <a:endParaRPr lang="en-US"/>
           </a:p>
@@ -1984,7 +1984,7 @@
             <a:fld id="{1D8BD707-D9CF-40AE-B4C6-C98DA3205C09}" type="datetimeFigureOut">
               <a:rPr lang="en-US" smtClean="0"/>
               <a:pPr/>
-              <a:t>5/27/2024</a:t>
+              <a:t>1/7/2026</a:t>
             </a:fld>
             <a:endParaRPr lang="en-US"/>
           </a:p>
@@ -2256,7 +2256,7 @@
             <a:fld id="{1D8BD707-D9CF-40AE-B4C6-C98DA3205C09}" type="datetimeFigureOut">
               <a:rPr lang="en-US" smtClean="0"/>
               <a:pPr/>
-              <a:t>5/27/2024</a:t>
+              <a:t>1/7/2026</a:t>
             </a:fld>
             <a:endParaRPr lang="en-US"/>
           </a:p>
@@ -2505,7 +2505,7 @@
             <a:fld id="{1D8BD707-D9CF-40AE-B4C6-C98DA3205C09}" type="datetimeFigureOut">
               <a:rPr lang="en-US" smtClean="0"/>
               <a:pPr/>
-              <a:t>5/27/2024</a:t>
+              <a:t>1/7/2026</a:t>
             </a:fld>
             <a:endParaRPr lang="en-US"/>
           </a:p>
@@ -2713,7 +2713,7 @@
             <a:fld id="{1D8BD707-D9CF-40AE-B4C6-C98DA3205C09}" type="datetimeFigureOut">
               <a:rPr lang="en-US" smtClean="0"/>
               <a:pPr/>
-              <a:t>5/27/2024</a:t>
+              <a:t>1/7/2026</a:t>
             </a:fld>
             <a:endParaRPr lang="en-US"/>
           </a:p>
@@ -3138,88 +3138,6 @@
               </a:rPr>
               <a:t>从中美网络战看网络安全：网络安全是国家命脉所系</a:t>
             </a:r>
-          </a:p>
-        </p:txBody>
-      </p:sp>
-      <p:sp>
-        <p:nvSpPr>
-          <p:cNvPr id="3" name="TextBox 3"/>
-          <p:cNvSpPr txBox="1"/>
-          <p:nvPr/>
-        </p:nvSpPr>
-        <p:spPr>
-          <a:xfrm>
-            <a:off x="717451" y="5208092"/>
-            <a:ext cx="3196742" cy="364715"/>
-          </a:xfrm>
-          <a:prstGeom prst="rect">
-            <a:avLst/>
-          </a:prstGeom>
-          <a:ln/>
-        </p:spPr>
-        <p:txBody>
-          <a:bodyPr vert="horz" wrap="square" lIns="114300" tIns="57150" rIns="114300" bIns="57150" rtlCol="0" anchor="t" anchorCtr="0">
-            <a:spAutoFit/>
-          </a:bodyPr>
-          <a:lstStyle/>
-          <a:p>
-            <a:pPr>
-              <a:lnSpc>
-                <a:spcPct val="80000"/>
-              </a:lnSpc>
-              <a:spcBef>
-                <a:spcPts val="450"/>
-              </a:spcBef>
-            </a:pPr>
-            <a:r>
-              <a:rPr lang="en-US" sz="2025" dirty="0" err="1">
-                <a:solidFill>
-                  <a:schemeClr val="accent1">
-                    <a:alpha val="100000"/>
-                  </a:schemeClr>
-                </a:solidFill>
-                <a:latin typeface="Arial"/>
-                <a:ea typeface="Arial"/>
-                <a:cs typeface="Arial"/>
-              </a:rPr>
-              <a:t>汇报人</a:t>
-            </a:r>
-            <a:r>
-              <a:rPr lang="en-US" sz="2025" dirty="0">
-                <a:solidFill>
-                  <a:schemeClr val="accent1">
-                    <a:alpha val="100000"/>
-                  </a:schemeClr>
-                </a:solidFill>
-                <a:latin typeface="Arial"/>
-                <a:ea typeface="Arial"/>
-                <a:cs typeface="Arial"/>
-              </a:rPr>
-              <a:t>：</a:t>
-            </a:r>
-            <a:r>
-              <a:rPr lang="zh-CN" altLang="en-US" sz="2025" dirty="0">
-                <a:solidFill>
-                  <a:schemeClr val="accent1">
-                    <a:alpha val="100000"/>
-                  </a:schemeClr>
-                </a:solidFill>
-                <a:latin typeface="Arial"/>
-                <a:ea typeface="Arial"/>
-                <a:cs typeface="Arial"/>
-              </a:rPr>
-              <a:t>李香颐</a:t>
-            </a:r>
-            <a:endParaRPr lang="en-US" sz="2025" dirty="0">
-              <a:solidFill>
-                <a:schemeClr val="accent1">
-                  <a:alpha val="100000"/>
-                </a:schemeClr>
-              </a:solidFill>
-              <a:latin typeface="Arial"/>
-              <a:ea typeface="Arial"/>
-              <a:cs typeface="Arial"/>
-            </a:endParaRPr>
           </a:p>
         </p:txBody>
       </p:sp>
